--- a/docs/presentation/Akilli_Konaklama_Tanitim_PUBLIC.pptx
+++ b/docs/presentation/Akilli_Konaklama_Tanitim_PUBLIC.pptx
@@ -3293,7 +3293,7 @@
                 </a:solidFill>
                 <a:latin typeface="Calibri"/>
               </a:rPr>
-              <a:t>Otel · butik otel · pansiyon · apart otel · tatil köyü için yapay zekâ destekli Windows masaüstü PMS</a:t>
+              <a:t>Otel · butik otel · pansiyon · apart otel · tatil köyü için yapay zekâ destekli Windows ve macOS masaüstü PMS</a:t>
             </a:r>
           </a:p>
         </p:txBody>
@@ -3411,7 +3411,7 @@
                 </a:solidFill>
                 <a:latin typeface="Calibri"/>
               </a:rPr>
-              <a:t>Windows masaüstü (.exe)</a:t>
+              <a:t>Windows 10/11 + macOS</a:t>
             </a:r>
           </a:p>
         </p:txBody>
@@ -8991,7 +8991,7 @@
                 </a:solidFill>
                 <a:latin typeface="Calibri"/>
               </a:rPr>
-              <a:t>187 test bu modülü kapsar. Komutun fiilen çalıştırıldığı katmanın kapsamı düşüktür ve bu boşluk test raporunda açıkça yazılıdır — kapsam sayıları docs/TEST_REPORT.md'de ölçümüyle durur.</a:t>
+              <a:t>ölçülmedi test bu modülü kapsar. Komutun fiilen çalıştırıldığı katmanın kapsamı düşüktür ve bu boşluk test raporunda açıkça yazılıdır — kapsam sayıları docs/TEST_REPORT.md'de ölçümüyle durur.</a:t>
             </a:r>
           </a:p>
         </p:txBody>
@@ -9939,7 +9939,7 @@
                 </a:solidFill>
                 <a:latin typeface="Calibri"/>
               </a:rPr>
-              <a:t>bandit: 0 yüksek, 0 orta, 9 düşük önemde bulgu — düşük bulguların her biri gerekçelendirilmiştir. Sayılar sunum üretilirken ölçülür.</a:t>
+              <a:t>bandit: ölçülmedi yüksek, ölçülmedi orta, ölçülmedi düşük önemde bulgu — düşük bulguların her biri gerekçelendirilmiştir. Sayılar sunum üretilirken ölçülür.</a:t>
             </a:r>
           </a:p>
         </p:txBody>
@@ -10092,7 +10092,7 @@
                 </a:solidFill>
                 <a:latin typeface="Calibri"/>
               </a:rPr>
-              <a:t>60</a:t>
+              <a:t>ölçülmedi</a:t>
             </a:r>
           </a:p>
         </p:txBody>
@@ -10131,7 +10131,7 @@
                 </a:solidFill>
                 <a:latin typeface="Calibri"/>
               </a:rPr>
-              <a:t>Veritabanı tablosu · 56 ORM modeli · Alembic ile sürümlenir</a:t>
+              <a:t>Veritabanı tablosu · ölçülmedi ORM modeli · Alembic ile sürümlenir</a:t>
             </a:r>
           </a:p>
         </p:txBody>
@@ -10214,7 +10214,7 @@
                 </a:solidFill>
                 <a:latin typeface="Calibri"/>
               </a:rPr>
-              <a:t>1075</a:t>
+              <a:t>ölçülmedi</a:t>
             </a:r>
           </a:p>
         </p:txBody>
@@ -10336,7 +10336,7 @@
                 </a:solidFill>
                 <a:latin typeface="Calibri"/>
               </a:rPr>
-              <a:t>%77,6</a:t>
+              <a:t>ölçülmedi</a:t>
             </a:r>
           </a:p>
         </p:txBody>
@@ -10458,7 +10458,7 @@
                 </a:solidFill>
                 <a:latin typeface="Calibri"/>
               </a:rPr>
-              <a:t>72</a:t>
+              <a:t>ölçülmedi</a:t>
             </a:r>
           </a:p>
         </p:txBody>
@@ -10497,7 +10497,7 @@
                 </a:solidFill>
                 <a:latin typeface="Calibri"/>
               </a:rPr>
-              <a:t>İzin · 7 varsayılan rol · yetki iki katmanda birden denetlenir</a:t>
+              <a:t>İzin · ölçülmedi varsayılan rol · yetki iki katmanda birden denetlenir</a:t>
             </a:r>
           </a:p>
         </p:txBody>
@@ -10702,7 +10702,7 @@
                 </a:solidFill>
                 <a:latin typeface="Calibri"/>
               </a:rPr>
-              <a:t>5</a:t>
+              <a:t>ölçülmedi</a:t>
             </a:r>
           </a:p>
         </p:txBody>
@@ -10946,7 +10946,7 @@
                 </a:solidFill>
                 <a:latin typeface="Calibri"/>
               </a:rPr>
-              <a:t>0</a:t>
+              <a:t>ölçülmedi</a:t>
             </a:r>
           </a:p>
         </p:txBody>
@@ -10985,7 +10985,7 @@
                 </a:solidFill>
                 <a:latin typeface="Calibri"/>
               </a:rPr>
-              <a:t>bandit'te yüksek önemde bulgu · orta: 0 · düşük: 9</a:t>
+              <a:t>bandit'te yüksek önemde bulgu · orta: ölçülmedi · düşük: ölçülmedi</a:t>
             </a:r>
           </a:p>
         </p:txBody>
@@ -11068,7 +11068,7 @@
                 </a:solidFill>
                 <a:latin typeface="Calibri"/>
               </a:rPr>
-              <a:t>Bu sayıların hiçbiri slayta elle yazılmadı: sunum üretilirken `sunum/olcum.py` tarafından kaynak koddan ölçüldü (19 Ağustos 2026). Ölçülemeyen bir değerin yerine rakam değil "ölçülmedi" basılır. Yöntem: docs/TEST_REPORT.md ve docs/SECURITY_REVIEW.md.</a:t>
+              <a:t>Bu sayıların hiçbiri slayta elle yazılmadı: sunum üretilirken `sunum/olcum.py` tarafından kaynak koddan ölçüldü (1 Eylül 2026). Ölçülemeyen bir değerin yerine rakam değil "ölçülmedi" basılır. Yöntem: docs/TEST_REPORT.md ve docs/SECURITY_REVIEW.md.</a:t>
             </a:r>
           </a:p>
         </p:txBody>
@@ -12125,7 +12125,7 @@
                 </a:solidFill>
                 <a:latin typeface="Calibri"/>
               </a:rPr>
-              <a:t>1075 test geçiyor ve hiçbiri ağa çıkmıyor — ağa çıkılmadığı da ayrı bir testle korunuyor. Sayı bu sunum üretilirken ölçüldü.</a:t>
+              <a:t>ölçülmedi test geçiyor ve hiçbiri ağa çıkmıyor — ağa çıkılmadığı da ayrı bir testle korunuyor. Sayı bu sunum üretilirken ölçüldü.</a:t>
             </a:r>
           </a:p>
         </p:txBody>
@@ -12326,7 +12326,7 @@
                 </a:solidFill>
                 <a:latin typeface="Calibri"/>
               </a:rPr>
-              <a:t>alan 99 · güvenlik 75 · altyapı 145 · uygulama 158 · yapay zekâ 123 · arayüz 182 · raporlama 106 · geliştirme merkezi 187.</a:t>
+              <a:t>ölçülmedi.</a:t>
             </a:r>
           </a:p>
         </p:txBody>
@@ -12929,7 +12929,7 @@
                 </a:solidFill>
                 <a:latin typeface="Calibri"/>
               </a:rPr>
-              <a:t>GitHub Actions (.github/workflows/ci.yml): biçim, lint, tip, test, güvenlik taraması, göç tutarlılığı ve "depoya hassas dosya girdi mi" denetimi. `ruff check app tests` şu an 0 bulgu veriyor.</a:t>
+              <a:t>GitHub Actions (.github/workflows/ci.yml): biçim, lint, tip, test, güvenlik taraması, göç tutarlılığı ve "depoya hassas dosya girdi mi" denetimi. `ruff check app tests` şu an ölçülmedi bulgu veriyor.</a:t>
             </a:r>
           </a:p>
         </p:txBody>
@@ -12964,7 +12964,7 @@
                 </a:solidFill>
                 <a:latin typeface="Calibri"/>
               </a:rPr>
-              <a:t>Rapor bir anlık görüntüdür: 19 Ağustos 2026, sürüm 0.1.0, Windows 11, Python 3.11. Sayılar üretim anında ölçülür; kod değişince değişirler.</a:t>
+              <a:t>Rapor bir anlık görüntüdür: 1 Eylül 2026, sürüm 0.1.0, Windows 11, Python 3.11. Sayılar üretim anında ölçülür; kod değişince değişirler.</a:t>
             </a:r>
           </a:p>
         </p:txBody>
@@ -13676,7 +13676,7 @@
                 </a:solidFill>
                 <a:latin typeface="Calibri"/>
               </a:rPr>
-              <a:t>60 tablo Alembic ile sürümlenir ve CI her değişiklikte şema ile göçlerin tutarlılığını doğrular. Durumlar sayı değil, metin olarak saklanır.</a:t>
+              <a:t>ölçülmedi tablo Alembic ile sürümlenir ve CI her değişiklikte şema ile göçlerin tutarlılığını doğrular. Durumlar sayı değil, metin olarak saklanır.</a:t>
             </a:r>
           </a:p>
         </p:txBody>
@@ -14585,7 +14585,7 @@
                 </a:solidFill>
                 <a:latin typeface="Calibri"/>
               </a:rPr>
-              <a:t>Windows Paketi</a:t>
+              <a:t>Platformlar ve İndirme</a:t>
             </a:r>
           </a:p>
         </p:txBody>
@@ -14624,7 +14624,7 @@
                 </a:solidFill>
                 <a:latin typeface="Calibri"/>
               </a:rPr>
-              <a:t>Yapı betiği PyInstaller ile .exe üretir; ilk açılışta kurulum sihirbazı veritabanını hazırlar ve yönetici parolasını bir kez gösterir.</a:t>
+              <a:t>Windows 10/11 (x64) + macOS (Apple Silicon) — İndirme: github.com/Azizsekerdil/smart-hotel-management-system/releases (v0.1.0). macOS paketi notarize edilmedi; ilk açılış: sağ tık → Aç.</a:t>
             </a:r>
           </a:p>
         </p:txBody>
@@ -16876,7 +16876,7 @@
                 </a:solidFill>
                 <a:latin typeface="Calibri"/>
               </a:rPr>
-              <a:t>60 tablo · 1075 test · %77,6 kapsam · şifreli kimlik verisi · yerel yapay zekâ seçeneği</a:t>
+              <a:t>ölçülmedi tablo · ölçülmedi test · ölçülmedi kapsam · şifreli kimlik verisi · yerel yapay zekâ seçeneği</a:t>
             </a:r>
           </a:p>
         </p:txBody>
@@ -17278,7 +17278,7 @@
                 </a:solidFill>
                 <a:latin typeface="Calibri"/>
               </a:rPr>
-              <a:t>github.com/Azizsekerdil/akilli-konaklama-yonetim-sistemi · MIT lisansı · Sürüm 0.1.0 · Ağustos 2026</a:t>
+              <a:t>github.com/Azizsekerdil/smart-hotel-management-system · MIT lisansı · Sürüm 0.1.0 · Ağustos 2026</a:t>
             </a:r>
           </a:p>
         </p:txBody>
